--- a/ppt/IoTAI12-KNN-lite.pptx
+++ b/ppt/IoTAI12-KNN-lite.pptx
@@ -14,9 +14,9 @@
     <p:sldId id="264" r:id="rId2"/>
     <p:sldId id="300" r:id="rId3"/>
     <p:sldId id="301" r:id="rId4"/>
-    <p:sldId id="281" r:id="rId5"/>
-    <p:sldId id="288" r:id="rId6"/>
-    <p:sldId id="302" r:id="rId7"/>
+    <p:sldId id="304" r:id="rId5"/>
+    <p:sldId id="305" r:id="rId6"/>
+    <p:sldId id="306" r:id="rId7"/>
   </p:sldIdLst>
   <p:sldSz cx="9144000" cy="6858000" type="screen4x3"/>
   <p:notesSz cx="6648450" cy="9782175"/>
@@ -4102,7 +4102,7 @@
     </p:spTree>
     <p:extLst>
       <p:ext uri="{BB962C8B-B14F-4D97-AF65-F5344CB8AC3E}">
-        <p14:creationId xmlns:p14="http://schemas.microsoft.com/office/powerpoint/2010/main" val="969714780"/>
+        <p14:creationId xmlns:p14="http://schemas.microsoft.com/office/powerpoint/2010/main" val="1037381909"/>
       </p:ext>
     </p:extLst>
   </p:cSld>
@@ -4241,7 +4241,7 @@
     </p:spTree>
     <p:extLst>
       <p:ext uri="{BB962C8B-B14F-4D97-AF65-F5344CB8AC3E}">
-        <p14:creationId xmlns:p14="http://schemas.microsoft.com/office/powerpoint/2010/main" val="2329841119"/>
+        <p14:creationId xmlns:p14="http://schemas.microsoft.com/office/powerpoint/2010/main" val="15504537"/>
       </p:ext>
     </p:extLst>
   </p:cSld>
@@ -4256,7 +4256,13 @@
   <p:cSld>
     <p:spTree>
       <p:nvGrpSpPr>
-        <p:cNvPr id="1" name=""/>
+        <p:cNvPr id="1" name="">
+          <a:extLst>
+            <a:ext uri="{FF2B5EF4-FFF2-40B4-BE49-F238E27FC236}">
+              <a16:creationId xmlns:a16="http://schemas.microsoft.com/office/drawing/2014/main" id="{DED54CAD-A94A-BAA7-1894-36B7D6413A05}"/>
+            </a:ext>
+          </a:extLst>
+        </p:cNvPr>
         <p:cNvGrpSpPr/>
         <p:nvPr/>
       </p:nvGrpSpPr>
@@ -4273,7 +4279,7 @@
           <p:cNvPr id="2" name="Titre 1">
             <a:extLst>
               <a:ext uri="{FF2B5EF4-FFF2-40B4-BE49-F238E27FC236}">
-                <a16:creationId xmlns:a16="http://schemas.microsoft.com/office/drawing/2014/main" id="{AEBFE3A5-6B0B-ED94-7172-C7DF133666E3}"/>
+                <a16:creationId xmlns:a16="http://schemas.microsoft.com/office/drawing/2014/main" id="{8CCFDC90-28F1-5F66-54C6-FD7B42473896}"/>
               </a:ext>
             </a:extLst>
           </p:cNvPr>
@@ -4301,7 +4307,7 @@
           <p:cNvPr id="3" name="Espace réservé du contenu 2">
             <a:extLst>
               <a:ext uri="{FF2B5EF4-FFF2-40B4-BE49-F238E27FC236}">
-                <a16:creationId xmlns:a16="http://schemas.microsoft.com/office/drawing/2014/main" id="{E5C70052-2114-7349-E1F6-2C09203C134C}"/>
+                <a16:creationId xmlns:a16="http://schemas.microsoft.com/office/drawing/2014/main" id="{A3F8C913-35E5-771C-304B-96863F7BD035}"/>
               </a:ext>
             </a:extLst>
           </p:cNvPr>
@@ -4318,20 +4324,42 @@
           <a:lstStyle/>
           <a:p>
             <a:r>
+              <a:rPr lang="fr-FR" dirty="0" err="1"/>
+              <a:t>kNN</a:t>
+            </a:r>
+            <a:r>
               <a:rPr lang="fr-FR" dirty="0"/>
-              <a:t>Refaire tourner et comprendre la démo de MNIST </a:t>
-            </a:r>
-            <a:r>
-              <a:rPr lang="fr-FR"/>
-              <a:t>en Python</a:t>
-            </a:r>
+              <a:t> MNIST</a:t>
+            </a:r>
+          </a:p>
+          <a:p>
+            <a:r>
+              <a:rPr lang="fr-FR" dirty="0"/>
+              <a:t>Création d'un </a:t>
+            </a:r>
+            <a:r>
+              <a:rPr lang="fr-FR" dirty="0" err="1"/>
+              <a:t>kNN</a:t>
+            </a:r>
+            <a:r>
+              <a:rPr lang="fr-FR" dirty="0"/>
+              <a:t> par </a:t>
+            </a:r>
+            <a:r>
+              <a:rPr lang="fr-FR" dirty="0" err="1"/>
+              <a:t>SKLearn</a:t>
+            </a:r>
+            <a:endParaRPr lang="fr-FR" dirty="0"/>
+          </a:p>
+          <a:p>
+            <a:endParaRPr lang="fr-FR" dirty="0"/>
           </a:p>
         </p:txBody>
       </p:sp>
     </p:spTree>
     <p:extLst>
       <p:ext uri="{BB962C8B-B14F-4D97-AF65-F5344CB8AC3E}">
-        <p14:creationId xmlns:p14="http://schemas.microsoft.com/office/powerpoint/2010/main" val="4076786138"/>
+        <p14:creationId xmlns:p14="http://schemas.microsoft.com/office/powerpoint/2010/main" val="3867572500"/>
       </p:ext>
     </p:extLst>
   </p:cSld>
